--- a/assets/Kvestefi_презентация_2026.pptx
+++ b/assets/Kvestefi_презентация_2026.pptx
@@ -7328,6 +7328,72 @@
                 <a:latin typeface="Segoe UI"/>
               </a:rPr>
               <a:t>Эмулятор Android 14 (x86_64), прогон 15 активностей</a:t>
+            </a:r>
+          </a:p>
+        </p:txBody>
+      </p:sp>
+      <p:sp>
+        <p:nvSpPr>
+          <p:cNvPr id="36" name="TextBox 35"/>
+          <p:cNvSpPr txBox="1"/>
+          <p:nvPr/>
+        </p:nvSpPr>
+        <p:spPr>
+          <a:xfrm>
+            <a:off x="640080" y="6318504"/>
+            <a:ext cx="3108960" cy="365760"/>
+          </a:xfrm>
+          <a:prstGeom prst="rect">
+            <a:avLst/>
+          </a:prstGeom>
+          <a:noFill/>
+        </p:spPr>
+        <p:txBody>
+          <a:bodyPr wrap="none">
+            <a:spAutoFit/>
+          </a:bodyPr>
+          <a:lstStyle/>
+          <a:p>
+            <a:r>
+              <a:rPr sz="1400" b="1">
+                <a:solidFill>
+                  <a:srgbClr val="F3F1FA"/>
+                </a:solidFill>
+              </a:rPr>
+              <a:t>Инструменты ИИ</a:t>
+            </a:r>
+          </a:p>
+        </p:txBody>
+      </p:sp>
+      <p:sp>
+        <p:nvSpPr>
+          <p:cNvPr id="37" name="TextBox 36"/>
+          <p:cNvSpPr txBox="1"/>
+          <p:nvPr/>
+        </p:nvSpPr>
+        <p:spPr>
+          <a:xfrm>
+            <a:off x="3931920" y="6318504"/>
+            <a:ext cx="6492240" cy="365760"/>
+          </a:xfrm>
+          <a:prstGeom prst="rect">
+            <a:avLst/>
+          </a:prstGeom>
+          <a:noFill/>
+        </p:spPr>
+        <p:txBody>
+          <a:bodyPr wrap="none">
+            <a:spAutoFit/>
+          </a:bodyPr>
+          <a:lstStyle/>
+          <a:p>
+            <a:r>
+              <a:rPr sz="1400" b="0">
+                <a:solidFill>
+                  <a:srgbClr val="E2DFEE"/>
+                </a:solidFill>
+              </a:rPr>
+              <a:t>ИИ-ассистенты: код, аудит ошибок, документация</a:t>
             </a:r>
           </a:p>
         </p:txBody>
